--- a/document/Muhammad Miftah Faridh==JCCI2023.pptx
+++ b/document/Muhammad Miftah Faridh==JCCI2023.pptx
@@ -2624,7 +2624,7 @@
           <a:p>
             <a:fld id="{B6FF37AB-1278-4555-8E1E-629030646749}" type="datetimeFigureOut">
               <a:rPr lang="en-US" smtClean="0"/>
-              <a:t>3/22/2023</a:t>
+              <a:t>4/4/2023</a:t>
             </a:fld>
             <a:endParaRPr lang="en-US"/>
           </a:p>
@@ -3038,7 +3038,7 @@
           <a:p>
             <a:fld id="{373F947A-B4DE-48EE-8D7C-4BB9A5B7195B}" type="datetime1">
               <a:rPr lang="en-US" smtClean="0"/>
-              <a:t>3/22/2023</a:t>
+              <a:t>4/4/2023</a:t>
             </a:fld>
             <a:endParaRPr lang="en-US"/>
           </a:p>
@@ -3236,7 +3236,7 @@
           <a:p>
             <a:fld id="{6DF1D984-3EC5-48C3-B2BF-F67012460C5F}" type="datetime1">
               <a:rPr lang="en-US" smtClean="0"/>
-              <a:t>3/22/2023</a:t>
+              <a:t>4/4/2023</a:t>
             </a:fld>
             <a:endParaRPr lang="en-US"/>
           </a:p>
@@ -3444,7 +3444,7 @@
           <a:p>
             <a:fld id="{9697B614-E20E-49D6-969D-0F733D373B69}" type="datetime1">
               <a:rPr lang="en-US" smtClean="0"/>
-              <a:t>3/22/2023</a:t>
+              <a:t>4/4/2023</a:t>
             </a:fld>
             <a:endParaRPr lang="en-US"/>
           </a:p>
@@ -3642,7 +3642,7 @@
           <a:p>
             <a:fld id="{BF4C6F01-8282-4E98-8BBB-1D4B0654D068}" type="datetime1">
               <a:rPr lang="en-US" smtClean="0"/>
-              <a:t>3/22/2023</a:t>
+              <a:t>4/4/2023</a:t>
             </a:fld>
             <a:endParaRPr lang="en-US"/>
           </a:p>
@@ -3917,7 +3917,7 @@
           <a:p>
             <a:fld id="{4DA74900-59BC-4422-846B-D368E7DA1F88}" type="datetime1">
               <a:rPr lang="en-US" smtClean="0"/>
-              <a:t>3/22/2023</a:t>
+              <a:t>4/4/2023</a:t>
             </a:fld>
             <a:endParaRPr lang="en-US"/>
           </a:p>
@@ -4182,7 +4182,7 @@
           <a:p>
             <a:fld id="{C3949FD8-F76C-4334-8F67-5261DAB8283B}" type="datetime1">
               <a:rPr lang="en-US" smtClean="0"/>
-              <a:t>3/22/2023</a:t>
+              <a:t>4/4/2023</a:t>
             </a:fld>
             <a:endParaRPr lang="en-US"/>
           </a:p>
@@ -4594,7 +4594,7 @@
           <a:p>
             <a:fld id="{FD3EE7BC-1A30-4086-BB3C-9A5B74FB52CD}" type="datetime1">
               <a:rPr lang="en-US" smtClean="0"/>
-              <a:t>3/22/2023</a:t>
+              <a:t>4/4/2023</a:t>
             </a:fld>
             <a:endParaRPr lang="en-US"/>
           </a:p>
@@ -4735,7 +4735,7 @@
           <a:p>
             <a:fld id="{7240562C-9A4D-4424-AA72-DCA8EAC67DF2}" type="datetime1">
               <a:rPr lang="en-US" smtClean="0"/>
-              <a:t>3/22/2023</a:t>
+              <a:t>4/4/2023</a:t>
             </a:fld>
             <a:endParaRPr lang="en-US"/>
           </a:p>
@@ -4848,7 +4848,7 @@
           <a:p>
             <a:fld id="{E2DCB292-5FFB-4199-8B72-18CE4DC27BE9}" type="datetime1">
               <a:rPr lang="en-US" smtClean="0"/>
-              <a:t>3/22/2023</a:t>
+              <a:t>4/4/2023</a:t>
             </a:fld>
             <a:endParaRPr lang="en-US"/>
           </a:p>
@@ -5159,7 +5159,7 @@
           <a:p>
             <a:fld id="{7A7481A3-5B6C-4EB6-A3A1-4996FCA10DC0}" type="datetime1">
               <a:rPr lang="en-US" smtClean="0"/>
-              <a:t>3/22/2023</a:t>
+              <a:t>4/4/2023</a:t>
             </a:fld>
             <a:endParaRPr lang="en-US"/>
           </a:p>
@@ -5447,7 +5447,7 @@
           <a:p>
             <a:fld id="{E405CF91-A7C1-47F6-886B-9E8209CA9E7C}" type="datetime1">
               <a:rPr lang="en-US" smtClean="0"/>
-              <a:t>3/22/2023</a:t>
+              <a:t>4/4/2023</a:t>
             </a:fld>
             <a:endParaRPr lang="en-US"/>
           </a:p>
@@ -5688,7 +5688,7 @@
           <a:p>
             <a:fld id="{ACF83ACE-CCB7-4256-8B11-BBA06764713F}" type="datetime1">
               <a:rPr lang="en-US" smtClean="0"/>
-              <a:t>3/22/2023</a:t>
+              <a:t>4/4/2023</a:t>
             </a:fld>
             <a:endParaRPr lang="en-US"/>
           </a:p>
@@ -6197,19 +6197,8 @@
                 <a:latin typeface="Malgun Gothic" panose="020B0503020000020004" pitchFamily="34" charset="-127"/>
                 <a:ea typeface="Malgun Gothic" panose="020B0503020000020004" pitchFamily="34" charset="-127"/>
               </a:rPr>
-              <a:t> Solar Power Generation Forecasting Based on </a:t>
+              <a:t> API Development for Forecasting Solar Power Generation Using Weather Data</a:t>
             </a:r>
-            <a:r>
-              <a:rPr lang="en-US" sz="4400">
-                <a:latin typeface="Malgun Gothic" panose="020B0503020000020004" pitchFamily="34" charset="-127"/>
-                <a:ea typeface="Malgun Gothic" panose="020B0503020000020004" pitchFamily="34" charset="-127"/>
-              </a:rPr>
-              <a:t>Regional Weather</a:t>
-            </a:r>
-            <a:endParaRPr lang="en-US" sz="4400" dirty="0">
-              <a:latin typeface="Malgun Gothic" panose="020B0503020000020004" pitchFamily="34" charset="-127"/>
-              <a:ea typeface="Malgun Gothic" panose="020B0503020000020004" pitchFamily="34" charset="-127"/>
-            </a:endParaRPr>
           </a:p>
         </p:txBody>
       </p:sp>
@@ -6237,7 +6226,7 @@
         </p:spPr>
         <p:txBody>
           <a:bodyPr>
-            <a:normAutofit fontScale="92500" lnSpcReduction="10000"/>
+            <a:normAutofit fontScale="85000" lnSpcReduction="20000"/>
           </a:bodyPr>
           <a:lstStyle/>
           <a:p>
@@ -6248,47 +6237,26 @@
             </a:pPr>
             <a:r>
               <a:rPr lang="en-US" dirty="0"/>
-              <a:t>Muhammad Miftah </a:t>
+              <a:t>Presented by :</a:t>
             </a:r>
-            <a:r>
-              <a:rPr lang="en-US" dirty="0" err="1"/>
-              <a:t>Faridh</a:t>
-            </a:r>
+          </a:p>
+          <a:p>
+            <a:pPr>
+              <a:lnSpc>
+                <a:spcPct val="120000"/>
+              </a:lnSpc>
+            </a:pPr>
             <a:r>
               <a:rPr lang="en-US" dirty="0"/>
-              <a:t>, Ida Bagus Krishna Yoga Utama, </a:t>
+              <a:t>Muhammad Miftah Faridh</a:t>
             </a:r>
-            <a:r>
-              <a:rPr lang="en-US" dirty="0" err="1"/>
-              <a:t>Radityo</a:t>
-            </a:r>
-            <a:r>
-              <a:rPr lang="en-US" dirty="0"/>
-              <a:t> </a:t>
-            </a:r>
-            <a:r>
-              <a:rPr lang="en-US" dirty="0" err="1"/>
-              <a:t>Fajar</a:t>
-            </a:r>
-            <a:r>
-              <a:rPr lang="en-US" dirty="0"/>
-              <a:t> </a:t>
-            </a:r>
-            <a:r>
-              <a:rPr lang="en-US" dirty="0" err="1"/>
-              <a:t>Pamungkas</a:t>
-            </a:r>
-            <a:r>
-              <a:rPr lang="en-US" dirty="0"/>
-              <a:t>, Duc Hoang Tran, </a:t>
-            </a:r>
-            <a:r>
-              <a:rPr lang="ko-KR" altLang="en-US" dirty="0"/>
-              <a:t>장영민</a:t>
-            </a:r>
-            <a:endParaRPr lang="en-US" altLang="ko-KR" dirty="0"/>
           </a:p>
           <a:p>
+            <a:pPr>
+              <a:lnSpc>
+                <a:spcPct val="120000"/>
+              </a:lnSpc>
+            </a:pPr>
             <a:r>
               <a:rPr lang="en-US" dirty="0"/>
               <a:t>Department of Electronics Engineering</a:t>
@@ -6445,8 +6413,8 @@
         </p:nvSpPr>
         <p:spPr>
           <a:xfrm>
-            <a:off x="4891088" y="3196880"/>
-            <a:ext cx="2986087" cy="369332"/>
+            <a:off x="2856513" y="3196880"/>
+            <a:ext cx="7055238" cy="369332"/>
           </a:xfrm>
           <a:prstGeom prst="rect">
             <a:avLst/>
@@ -6461,15 +6429,7 @@
           <a:p>
             <a:r>
               <a:rPr lang="en-US" dirty="0"/>
-              <a:t>1</a:t>
-            </a:r>
-            <a:r>
-              <a:rPr lang="en-US" baseline="30000" dirty="0"/>
-              <a:t>st</a:t>
-            </a:r>
-            <a:r>
-              <a:rPr lang="en-US" dirty="0"/>
-              <a:t> Korea Energy Conference</a:t>
+              <a:t>THE 33rd JOINT CONFERENCE ON COMMUNICATIONS AND INFORMATION</a:t>
             </a:r>
           </a:p>
         </p:txBody>

--- a/document/Muhammad Miftah Faridh==JCCI2023.pptx
+++ b/document/Muhammad Miftah Faridh==JCCI2023.pptx
@@ -992,6 +992,42 @@
         </a:p>
       </dgm:t>
     </dgm:pt>
+    <dgm:pt modelId="{ADC52CD0-5DC5-426D-903A-3D879C76BEA0}">
+      <dgm:prSet phldrT="[Text]"/>
+      <dgm:spPr/>
+      <dgm:t>
+        <a:bodyPr/>
+        <a:lstStyle/>
+        <a:p>
+          <a:r>
+            <a:rPr lang="en-US" dirty="0"/>
+            <a:t>Rest API</a:t>
+          </a:r>
+        </a:p>
+      </dgm:t>
+    </dgm:pt>
+    <dgm:pt modelId="{8516D387-5932-47B5-9181-9774F75EECAC}" type="parTrans" cxnId="{0DD24E93-9C60-4DCF-86EF-DE8E4091C165}">
+      <dgm:prSet/>
+      <dgm:spPr/>
+      <dgm:t>
+        <a:bodyPr/>
+        <a:lstStyle/>
+        <a:p>
+          <a:endParaRPr lang="en-US"/>
+        </a:p>
+      </dgm:t>
+    </dgm:pt>
+    <dgm:pt modelId="{3AFB7454-15A9-4F5E-9339-04DD8C0F2527}" type="sibTrans" cxnId="{0DD24E93-9C60-4DCF-86EF-DE8E4091C165}">
+      <dgm:prSet/>
+      <dgm:spPr/>
+      <dgm:t>
+        <a:bodyPr/>
+        <a:lstStyle/>
+        <a:p>
+          <a:endParaRPr lang="en-US"/>
+        </a:p>
+      </dgm:t>
+    </dgm:pt>
     <dgm:pt modelId="{17C6D758-4CFD-4A2B-BB7F-5D7DE2DC000A}" type="pres">
       <dgm:prSet presAssocID="{2CF927C6-88F1-4267-A6DA-2C822A42AF47}" presName="CompostProcess" presStyleCnt="0">
         <dgm:presLayoutVars>
@@ -1010,7 +1046,7 @@
       <dgm:spPr/>
     </dgm:pt>
     <dgm:pt modelId="{5721BE87-A9A2-40E8-AE31-54768F478623}" type="pres">
-      <dgm:prSet presAssocID="{60C11FAA-D68A-48C9-B78C-EBD2D1ED0241}" presName="textNode" presStyleLbl="node1" presStyleIdx="0" presStyleCnt="3">
+      <dgm:prSet presAssocID="{60C11FAA-D68A-48C9-B78C-EBD2D1ED0241}" presName="textNode" presStyleLbl="node1" presStyleIdx="0" presStyleCnt="4">
         <dgm:presLayoutVars>
           <dgm:bulletEnabled val="1"/>
         </dgm:presLayoutVars>
@@ -1022,7 +1058,7 @@
       <dgm:spPr/>
     </dgm:pt>
     <dgm:pt modelId="{8A2D99CD-09BB-41F7-9350-F4944190EF5B}" type="pres">
-      <dgm:prSet presAssocID="{FF88E92C-B3F8-4613-9B33-1693C85612B9}" presName="textNode" presStyleLbl="node1" presStyleIdx="1" presStyleCnt="3">
+      <dgm:prSet presAssocID="{FF88E92C-B3F8-4613-9B33-1693C85612B9}" presName="textNode" presStyleLbl="node1" presStyleIdx="1" presStyleCnt="4">
         <dgm:presLayoutVars>
           <dgm:bulletEnabled val="1"/>
         </dgm:presLayoutVars>
@@ -1034,7 +1070,19 @@
       <dgm:spPr/>
     </dgm:pt>
     <dgm:pt modelId="{9CBB97C6-1C83-4062-AE30-AC438F481460}" type="pres">
-      <dgm:prSet presAssocID="{27CEA71A-04F7-41D7-AB9D-999A66123035}" presName="textNode" presStyleLbl="node1" presStyleIdx="2" presStyleCnt="3">
+      <dgm:prSet presAssocID="{27CEA71A-04F7-41D7-AB9D-999A66123035}" presName="textNode" presStyleLbl="node1" presStyleIdx="2" presStyleCnt="4">
+        <dgm:presLayoutVars>
+          <dgm:bulletEnabled val="1"/>
+        </dgm:presLayoutVars>
+      </dgm:prSet>
+      <dgm:spPr/>
+    </dgm:pt>
+    <dgm:pt modelId="{A538311F-69B7-4F85-A2A9-AD57432D4E39}" type="pres">
+      <dgm:prSet presAssocID="{CDA7A307-40B8-4BD6-80F6-EC44CB00C697}" presName="sibTrans" presStyleCnt="0"/>
+      <dgm:spPr/>
+    </dgm:pt>
+    <dgm:pt modelId="{40D50B7C-FB6F-4D00-8ACF-9ACE83044674}" type="pres">
+      <dgm:prSet presAssocID="{ADC52CD0-5DC5-426D-903A-3D879C76BEA0}" presName="textNode" presStyleLbl="node1" presStyleIdx="3" presStyleCnt="4">
         <dgm:presLayoutVars>
           <dgm:bulletEnabled val="1"/>
         </dgm:presLayoutVars>
@@ -1046,9 +1094,11 @@
     <dgm:cxn modelId="{94AB4C2C-CED2-4AC6-92D8-294D9DB73847}" type="presOf" srcId="{2CF927C6-88F1-4267-A6DA-2C822A42AF47}" destId="{17C6D758-4CFD-4A2B-BB7F-5D7DE2DC000A}" srcOrd="0" destOrd="0" presId="urn:microsoft.com/office/officeart/2005/8/layout/hProcess9"/>
     <dgm:cxn modelId="{14A79353-3584-4468-AB8A-CD29C6139CBD}" srcId="{2CF927C6-88F1-4267-A6DA-2C822A42AF47}" destId="{FF88E92C-B3F8-4613-9B33-1693C85612B9}" srcOrd="1" destOrd="0" parTransId="{CA7F3CE3-D956-4C72-B5EF-B3DF41BCCFD1}" sibTransId="{68D87F2F-CA86-4A08-9563-3FA088FE0F5D}"/>
     <dgm:cxn modelId="{DF363593-C6B0-487C-B409-57B5079F9271}" type="presOf" srcId="{FF88E92C-B3F8-4613-9B33-1693C85612B9}" destId="{8A2D99CD-09BB-41F7-9350-F4944190EF5B}" srcOrd="0" destOrd="0" presId="urn:microsoft.com/office/officeart/2005/8/layout/hProcess9"/>
+    <dgm:cxn modelId="{0DD24E93-9C60-4DCF-86EF-DE8E4091C165}" srcId="{2CF927C6-88F1-4267-A6DA-2C822A42AF47}" destId="{ADC52CD0-5DC5-426D-903A-3D879C76BEA0}" srcOrd="3" destOrd="0" parTransId="{8516D387-5932-47B5-9181-9774F75EECAC}" sibTransId="{3AFB7454-15A9-4F5E-9339-04DD8C0F2527}"/>
     <dgm:cxn modelId="{E12FFB9C-0BAD-4FFD-97D6-98E2571595FB}" srcId="{2CF927C6-88F1-4267-A6DA-2C822A42AF47}" destId="{27CEA71A-04F7-41D7-AB9D-999A66123035}" srcOrd="2" destOrd="0" parTransId="{2699C68D-7F41-42F9-BFCE-793153F355EE}" sibTransId="{CDA7A307-40B8-4BD6-80F6-EC44CB00C697}"/>
     <dgm:cxn modelId="{6BE410A8-F9E9-4998-A5DA-DB78A867885E}" type="presOf" srcId="{60C11FAA-D68A-48C9-B78C-EBD2D1ED0241}" destId="{5721BE87-A9A2-40E8-AE31-54768F478623}" srcOrd="0" destOrd="0" presId="urn:microsoft.com/office/officeart/2005/8/layout/hProcess9"/>
     <dgm:cxn modelId="{F755B6C8-AC83-40F6-9E55-630C7E17F9BE}" srcId="{2CF927C6-88F1-4267-A6DA-2C822A42AF47}" destId="{60C11FAA-D68A-48C9-B78C-EBD2D1ED0241}" srcOrd="0" destOrd="0" parTransId="{1D98507F-7CBC-4922-B9D1-D837AEEBD702}" sibTransId="{B028D761-0834-4C4A-ADC2-D1F23D8009DC}"/>
+    <dgm:cxn modelId="{8AF193DC-D0DD-4798-B7EB-F30A05D6DC05}" type="presOf" srcId="{ADC52CD0-5DC5-426D-903A-3D879C76BEA0}" destId="{40D50B7C-FB6F-4D00-8ACF-9ACE83044674}" srcOrd="0" destOrd="0" presId="urn:microsoft.com/office/officeart/2005/8/layout/hProcess9"/>
     <dgm:cxn modelId="{C434C6F4-6ACB-4F59-825E-4ACA06D0CCB9}" type="presOf" srcId="{27CEA71A-04F7-41D7-AB9D-999A66123035}" destId="{9CBB97C6-1C83-4062-AE30-AC438F481460}" srcOrd="0" destOrd="0" presId="urn:microsoft.com/office/officeart/2005/8/layout/hProcess9"/>
     <dgm:cxn modelId="{64D227C9-0490-4D0C-A279-C4D3A0F0CAD7}" type="presParOf" srcId="{17C6D758-4CFD-4A2B-BB7F-5D7DE2DC000A}" destId="{DB05E06D-678C-4CDB-A4D0-D166E0C05A4D}" srcOrd="0" destOrd="0" presId="urn:microsoft.com/office/officeart/2005/8/layout/hProcess9"/>
     <dgm:cxn modelId="{E9A33519-ACDC-404F-95CD-AAC6BCE9A819}" type="presParOf" srcId="{17C6D758-4CFD-4A2B-BB7F-5D7DE2DC000A}" destId="{2D5BAECB-7CD7-4B27-A9AA-53BD5424660B}" srcOrd="1" destOrd="0" presId="urn:microsoft.com/office/officeart/2005/8/layout/hProcess9"/>
@@ -1057,6 +1107,8 @@
     <dgm:cxn modelId="{2F149203-A81C-447C-8733-6D8D171455B4}" type="presParOf" srcId="{2D5BAECB-7CD7-4B27-A9AA-53BD5424660B}" destId="{8A2D99CD-09BB-41F7-9350-F4944190EF5B}" srcOrd="2" destOrd="0" presId="urn:microsoft.com/office/officeart/2005/8/layout/hProcess9"/>
     <dgm:cxn modelId="{E93DAC83-3969-4BDC-8A5F-F405F71B71B5}" type="presParOf" srcId="{2D5BAECB-7CD7-4B27-A9AA-53BD5424660B}" destId="{445B30F6-2F92-40F0-9BDC-18531DAC6E7A}" srcOrd="3" destOrd="0" presId="urn:microsoft.com/office/officeart/2005/8/layout/hProcess9"/>
     <dgm:cxn modelId="{5576E1C7-1399-4F05-90AB-6B1FA8946791}" type="presParOf" srcId="{2D5BAECB-7CD7-4B27-A9AA-53BD5424660B}" destId="{9CBB97C6-1C83-4062-AE30-AC438F481460}" srcOrd="4" destOrd="0" presId="urn:microsoft.com/office/officeart/2005/8/layout/hProcess9"/>
+    <dgm:cxn modelId="{9DDE7AFA-18F1-4B3C-BE6F-1F2362DC755E}" type="presParOf" srcId="{2D5BAECB-7CD7-4B27-A9AA-53BD5424660B}" destId="{A538311F-69B7-4F85-A2A9-AD57432D4E39}" srcOrd="5" destOrd="0" presId="urn:microsoft.com/office/officeart/2005/8/layout/hProcess9"/>
+    <dgm:cxn modelId="{B2087AE4-C0DA-478B-B627-CF77D3A4E514}" type="presParOf" srcId="{2D5BAECB-7CD7-4B27-A9AA-53BD5424660B}" destId="{40D50B7C-FB6F-4D00-8ACF-9ACE83044674}" srcOrd="6" destOrd="0" presId="urn:microsoft.com/office/officeart/2005/8/layout/hProcess9"/>
   </dgm:cxnLst>
   <dgm:bg/>
   <dgm:whole/>
@@ -1123,8 +1175,8 @@
       </dsp:nvSpPr>
       <dsp:spPr>
         <a:xfrm>
-          <a:off x="367" y="522030"/>
-          <a:ext cx="3498083" cy="696040"/>
+          <a:off x="3005" y="522030"/>
+          <a:ext cx="2608952" cy="696040"/>
         </a:xfrm>
         <a:prstGeom prst="roundRect">
           <a:avLst/>
@@ -1166,12 +1218,12 @@
         </a:fontRef>
       </dsp:style>
       <dsp:txBody>
-        <a:bodyPr spcFirstLastPara="0" vert="horz" wrap="square" lIns="99060" tIns="99060" rIns="99060" bIns="99060" numCol="1" spcCol="1270" anchor="ctr" anchorCtr="0">
+        <a:bodyPr spcFirstLastPara="0" vert="horz" wrap="square" lIns="72390" tIns="72390" rIns="72390" bIns="72390" numCol="1" spcCol="1270" anchor="ctr" anchorCtr="0">
           <a:noAutofit/>
         </a:bodyPr>
         <a:lstStyle/>
         <a:p>
-          <a:pPr marL="0" lvl="0" indent="0" algn="ctr" defTabSz="1155700">
+          <a:pPr marL="0" lvl="0" indent="0" algn="ctr" defTabSz="844550">
             <a:lnSpc>
               <a:spcPct val="90000"/>
             </a:lnSpc>
@@ -1184,14 +1236,14 @@
             <a:buNone/>
           </a:pPr>
           <a:r>
-            <a:rPr lang="en-US" sz="2600" kern="1200" dirty="0"/>
+            <a:rPr lang="en-US" sz="1900" kern="1200" dirty="0"/>
             <a:t>Weather &amp; Energy Data</a:t>
           </a:r>
         </a:p>
       </dsp:txBody>
       <dsp:txXfrm>
-        <a:off x="34345" y="556008"/>
-        <a:ext cx="3430127" cy="628084"/>
+        <a:off x="36983" y="556008"/>
+        <a:ext cx="2540996" cy="628084"/>
       </dsp:txXfrm>
     </dsp:sp>
     <dsp:sp modelId="{8A2D99CD-09BB-41F7-9350-F4944190EF5B}">
@@ -1201,8 +1253,8 @@
       </dsp:nvSpPr>
       <dsp:spPr>
         <a:xfrm>
-          <a:off x="3722327" y="522030"/>
-          <a:ext cx="3498083" cy="696040"/>
+          <a:off x="2778930" y="522030"/>
+          <a:ext cx="2608952" cy="696040"/>
         </a:xfrm>
         <a:prstGeom prst="roundRect">
           <a:avLst/>
@@ -1244,12 +1296,12 @@
         </a:fontRef>
       </dsp:style>
       <dsp:txBody>
-        <a:bodyPr spcFirstLastPara="0" vert="horz" wrap="square" lIns="99060" tIns="99060" rIns="99060" bIns="99060" numCol="1" spcCol="1270" anchor="ctr" anchorCtr="0">
+        <a:bodyPr spcFirstLastPara="0" vert="horz" wrap="square" lIns="72390" tIns="72390" rIns="72390" bIns="72390" numCol="1" spcCol="1270" anchor="ctr" anchorCtr="0">
           <a:noAutofit/>
         </a:bodyPr>
         <a:lstStyle/>
         <a:p>
-          <a:pPr marL="0" lvl="0" indent="0" algn="ctr" defTabSz="1155700">
+          <a:pPr marL="0" lvl="0" indent="0" algn="ctr" defTabSz="844550">
             <a:lnSpc>
               <a:spcPct val="90000"/>
             </a:lnSpc>
@@ -1262,14 +1314,14 @@
             <a:buNone/>
           </a:pPr>
           <a:r>
-            <a:rPr lang="en-US" sz="2600" kern="1200" dirty="0"/>
+            <a:rPr lang="en-US" sz="1900" kern="1200" dirty="0"/>
             <a:t>Forecast Model</a:t>
           </a:r>
         </a:p>
       </dsp:txBody>
       <dsp:txXfrm>
-        <a:off x="3756305" y="556008"/>
-        <a:ext cx="3430127" cy="628084"/>
+        <a:off x="2812908" y="556008"/>
+        <a:ext cx="2540996" cy="628084"/>
       </dsp:txXfrm>
     </dsp:sp>
     <dsp:sp modelId="{9CBB97C6-1C83-4062-AE30-AC438F481460}">
@@ -1279,8 +1331,8 @@
       </dsp:nvSpPr>
       <dsp:spPr>
         <a:xfrm>
-          <a:off x="7444288" y="522030"/>
-          <a:ext cx="3498083" cy="696040"/>
+          <a:off x="5554855" y="522030"/>
+          <a:ext cx="2608952" cy="696040"/>
         </a:xfrm>
         <a:prstGeom prst="roundRect">
           <a:avLst/>
@@ -1322,12 +1374,12 @@
         </a:fontRef>
       </dsp:style>
       <dsp:txBody>
-        <a:bodyPr spcFirstLastPara="0" vert="horz" wrap="square" lIns="99060" tIns="99060" rIns="99060" bIns="99060" numCol="1" spcCol="1270" anchor="ctr" anchorCtr="0">
+        <a:bodyPr spcFirstLastPara="0" vert="horz" wrap="square" lIns="72390" tIns="72390" rIns="72390" bIns="72390" numCol="1" spcCol="1270" anchor="ctr" anchorCtr="0">
           <a:noAutofit/>
         </a:bodyPr>
         <a:lstStyle/>
         <a:p>
-          <a:pPr marL="0" lvl="0" indent="0" algn="ctr" defTabSz="1155700">
+          <a:pPr marL="0" lvl="0" indent="0" algn="ctr" defTabSz="844550">
             <a:lnSpc>
               <a:spcPct val="90000"/>
             </a:lnSpc>
@@ -1340,14 +1392,92 @@
             <a:buNone/>
           </a:pPr>
           <a:r>
-            <a:rPr lang="en-US" sz="2600" kern="1200" dirty="0"/>
+            <a:rPr lang="en-US" sz="1900" kern="1200" dirty="0"/>
             <a:t>Comparison Model</a:t>
           </a:r>
         </a:p>
       </dsp:txBody>
       <dsp:txXfrm>
-        <a:off x="7478266" y="556008"/>
-        <a:ext cx="3430127" cy="628084"/>
+        <a:off x="5588833" y="556008"/>
+        <a:ext cx="2540996" cy="628084"/>
+      </dsp:txXfrm>
+    </dsp:sp>
+    <dsp:sp modelId="{40D50B7C-FB6F-4D00-8ACF-9ACE83044674}">
+      <dsp:nvSpPr>
+        <dsp:cNvPr id="0" name=""/>
+        <dsp:cNvSpPr/>
+      </dsp:nvSpPr>
+      <dsp:spPr>
+        <a:xfrm>
+          <a:off x="8330781" y="522030"/>
+          <a:ext cx="2608952" cy="696040"/>
+        </a:xfrm>
+        <a:prstGeom prst="roundRect">
+          <a:avLst/>
+        </a:prstGeom>
+        <a:solidFill>
+          <a:schemeClr val="accent1">
+            <a:hueOff val="0"/>
+            <a:satOff val="0"/>
+            <a:lumOff val="0"/>
+            <a:alphaOff val="0"/>
+          </a:schemeClr>
+        </a:solidFill>
+        <a:ln w="12700" cap="flat" cmpd="sng" algn="ctr">
+          <a:solidFill>
+            <a:schemeClr val="lt1">
+              <a:hueOff val="0"/>
+              <a:satOff val="0"/>
+              <a:lumOff val="0"/>
+              <a:alphaOff val="0"/>
+            </a:schemeClr>
+          </a:solidFill>
+          <a:prstDash val="solid"/>
+          <a:miter lim="800000"/>
+        </a:ln>
+        <a:effectLst/>
+      </dsp:spPr>
+      <dsp:style>
+        <a:lnRef idx="2">
+          <a:scrgbClr r="0" g="0" b="0"/>
+        </a:lnRef>
+        <a:fillRef idx="1">
+          <a:scrgbClr r="0" g="0" b="0"/>
+        </a:fillRef>
+        <a:effectRef idx="0">
+          <a:scrgbClr r="0" g="0" b="0"/>
+        </a:effectRef>
+        <a:fontRef idx="minor">
+          <a:schemeClr val="lt1"/>
+        </a:fontRef>
+      </dsp:style>
+      <dsp:txBody>
+        <a:bodyPr spcFirstLastPara="0" vert="horz" wrap="square" lIns="72390" tIns="72390" rIns="72390" bIns="72390" numCol="1" spcCol="1270" anchor="ctr" anchorCtr="0">
+          <a:noAutofit/>
+        </a:bodyPr>
+        <a:lstStyle/>
+        <a:p>
+          <a:pPr marL="0" lvl="0" indent="0" algn="ctr" defTabSz="844550">
+            <a:lnSpc>
+              <a:spcPct val="90000"/>
+            </a:lnSpc>
+            <a:spcBef>
+              <a:spcPct val="0"/>
+            </a:spcBef>
+            <a:spcAft>
+              <a:spcPct val="35000"/>
+            </a:spcAft>
+            <a:buNone/>
+          </a:pPr>
+          <a:r>
+            <a:rPr lang="en-US" sz="1900" kern="1200" dirty="0"/>
+            <a:t>Rest API</a:t>
+          </a:r>
+        </a:p>
+      </dsp:txBody>
+      <dsp:txXfrm>
+        <a:off x="8364759" y="556008"/>
+        <a:ext cx="2540996" cy="628084"/>
       </dsp:txXfrm>
     </dsp:sp>
   </dsp:spTree>
@@ -2624,7 +2754,7 @@
           <a:p>
             <a:fld id="{B6FF37AB-1278-4555-8E1E-629030646749}" type="datetimeFigureOut">
               <a:rPr lang="en-US" smtClean="0"/>
-              <a:t>4/4/2023</a:t>
+              <a:t>4/8/2023</a:t>
             </a:fld>
             <a:endParaRPr lang="en-US"/>
           </a:p>
@@ -3038,7 +3168,7 @@
           <a:p>
             <a:fld id="{373F947A-B4DE-48EE-8D7C-4BB9A5B7195B}" type="datetime1">
               <a:rPr lang="en-US" smtClean="0"/>
-              <a:t>4/4/2023</a:t>
+              <a:t>4/8/2023</a:t>
             </a:fld>
             <a:endParaRPr lang="en-US"/>
           </a:p>
@@ -3236,7 +3366,7 @@
           <a:p>
             <a:fld id="{6DF1D984-3EC5-48C3-B2BF-F67012460C5F}" type="datetime1">
               <a:rPr lang="en-US" smtClean="0"/>
-              <a:t>4/4/2023</a:t>
+              <a:t>4/8/2023</a:t>
             </a:fld>
             <a:endParaRPr lang="en-US"/>
           </a:p>
@@ -3444,7 +3574,7 @@
           <a:p>
             <a:fld id="{9697B614-E20E-49D6-969D-0F733D373B69}" type="datetime1">
               <a:rPr lang="en-US" smtClean="0"/>
-              <a:t>4/4/2023</a:t>
+              <a:t>4/8/2023</a:t>
             </a:fld>
             <a:endParaRPr lang="en-US"/>
           </a:p>
@@ -3642,7 +3772,7 @@
           <a:p>
             <a:fld id="{BF4C6F01-8282-4E98-8BBB-1D4B0654D068}" type="datetime1">
               <a:rPr lang="en-US" smtClean="0"/>
-              <a:t>4/4/2023</a:t>
+              <a:t>4/8/2023</a:t>
             </a:fld>
             <a:endParaRPr lang="en-US"/>
           </a:p>
@@ -3917,7 +4047,7 @@
           <a:p>
             <a:fld id="{4DA74900-59BC-4422-846B-D368E7DA1F88}" type="datetime1">
               <a:rPr lang="en-US" smtClean="0"/>
-              <a:t>4/4/2023</a:t>
+              <a:t>4/8/2023</a:t>
             </a:fld>
             <a:endParaRPr lang="en-US"/>
           </a:p>
@@ -4182,7 +4312,7 @@
           <a:p>
             <a:fld id="{C3949FD8-F76C-4334-8F67-5261DAB8283B}" type="datetime1">
               <a:rPr lang="en-US" smtClean="0"/>
-              <a:t>4/4/2023</a:t>
+              <a:t>4/8/2023</a:t>
             </a:fld>
             <a:endParaRPr lang="en-US"/>
           </a:p>
@@ -4594,7 +4724,7 @@
           <a:p>
             <a:fld id="{FD3EE7BC-1A30-4086-BB3C-9A5B74FB52CD}" type="datetime1">
               <a:rPr lang="en-US" smtClean="0"/>
-              <a:t>4/4/2023</a:t>
+              <a:t>4/8/2023</a:t>
             </a:fld>
             <a:endParaRPr lang="en-US"/>
           </a:p>
@@ -4735,7 +4865,7 @@
           <a:p>
             <a:fld id="{7240562C-9A4D-4424-AA72-DCA8EAC67DF2}" type="datetime1">
               <a:rPr lang="en-US" smtClean="0"/>
-              <a:t>4/4/2023</a:t>
+              <a:t>4/8/2023</a:t>
             </a:fld>
             <a:endParaRPr lang="en-US"/>
           </a:p>
@@ -4848,7 +4978,7 @@
           <a:p>
             <a:fld id="{E2DCB292-5FFB-4199-8B72-18CE4DC27BE9}" type="datetime1">
               <a:rPr lang="en-US" smtClean="0"/>
-              <a:t>4/4/2023</a:t>
+              <a:t>4/8/2023</a:t>
             </a:fld>
             <a:endParaRPr lang="en-US"/>
           </a:p>
@@ -5159,7 +5289,7 @@
           <a:p>
             <a:fld id="{7A7481A3-5B6C-4EB6-A3A1-4996FCA10DC0}" type="datetime1">
               <a:rPr lang="en-US" smtClean="0"/>
-              <a:t>4/4/2023</a:t>
+              <a:t>4/8/2023</a:t>
             </a:fld>
             <a:endParaRPr lang="en-US"/>
           </a:p>
@@ -5447,7 +5577,7 @@
           <a:p>
             <a:fld id="{E405CF91-A7C1-47F6-886B-9E8209CA9E7C}" type="datetime1">
               <a:rPr lang="en-US" smtClean="0"/>
-              <a:t>4/4/2023</a:t>
+              <a:t>4/8/2023</a:t>
             </a:fld>
             <a:endParaRPr lang="en-US"/>
           </a:p>
@@ -5688,7 +5818,7 @@
           <a:p>
             <a:fld id="{ACF83ACE-CCB7-4256-8B11-BBA06764713F}" type="datetime1">
               <a:rPr lang="en-US" smtClean="0"/>
-              <a:t>4/4/2023</a:t>
+              <a:t>4/8/2023</a:t>
             </a:fld>
             <a:endParaRPr lang="en-US"/>
           </a:p>
@@ -28834,7 +28964,7 @@
         </p:blipFill>
         <p:spPr bwMode="auto">
           <a:xfrm>
-            <a:off x="9982200" y="2063639"/>
+            <a:off x="9601168" y="2357272"/>
             <a:ext cx="1955695" cy="1908283"/>
           </a:xfrm>
           <a:prstGeom prst="rect">
@@ -29294,7 +29424,7 @@
           <p:nvPr>
             <p:extLst>
               <p:ext uri="{D42A27DB-BD31-4B8C-83A1-F6EECF244321}">
-                <p14:modId xmlns:p14="http://schemas.microsoft.com/office/powerpoint/2010/main" val="4206841447"/>
+                <p14:modId xmlns:p14="http://schemas.microsoft.com/office/powerpoint/2010/main" val="2283059010"/>
               </p:ext>
             </p:extLst>
           </p:nvPr>

--- a/document/Muhammad Miftah Faridh==JCCI2023.pptx
+++ b/document/Muhammad Miftah Faridh==JCCI2023.pptx
@@ -2754,7 +2754,7 @@
           <a:p>
             <a:fld id="{B6FF37AB-1278-4555-8E1E-629030646749}" type="datetimeFigureOut">
               <a:rPr lang="en-US" smtClean="0"/>
-              <a:t>4/8/2023</a:t>
+              <a:t>4/10/2023</a:t>
             </a:fld>
             <a:endParaRPr lang="en-US"/>
           </a:p>
@@ -3168,7 +3168,7 @@
           <a:p>
             <a:fld id="{373F947A-B4DE-48EE-8D7C-4BB9A5B7195B}" type="datetime1">
               <a:rPr lang="en-US" smtClean="0"/>
-              <a:t>4/8/2023</a:t>
+              <a:t>4/10/2023</a:t>
             </a:fld>
             <a:endParaRPr lang="en-US"/>
           </a:p>
@@ -3366,7 +3366,7 @@
           <a:p>
             <a:fld id="{6DF1D984-3EC5-48C3-B2BF-F67012460C5F}" type="datetime1">
               <a:rPr lang="en-US" smtClean="0"/>
-              <a:t>4/8/2023</a:t>
+              <a:t>4/10/2023</a:t>
             </a:fld>
             <a:endParaRPr lang="en-US"/>
           </a:p>
@@ -3574,7 +3574,7 @@
           <a:p>
             <a:fld id="{9697B614-E20E-49D6-969D-0F733D373B69}" type="datetime1">
               <a:rPr lang="en-US" smtClean="0"/>
-              <a:t>4/8/2023</a:t>
+              <a:t>4/10/2023</a:t>
             </a:fld>
             <a:endParaRPr lang="en-US"/>
           </a:p>
@@ -3772,7 +3772,7 @@
           <a:p>
             <a:fld id="{BF4C6F01-8282-4E98-8BBB-1D4B0654D068}" type="datetime1">
               <a:rPr lang="en-US" smtClean="0"/>
-              <a:t>4/8/2023</a:t>
+              <a:t>4/10/2023</a:t>
             </a:fld>
             <a:endParaRPr lang="en-US"/>
           </a:p>
@@ -4047,7 +4047,7 @@
           <a:p>
             <a:fld id="{4DA74900-59BC-4422-846B-D368E7DA1F88}" type="datetime1">
               <a:rPr lang="en-US" smtClean="0"/>
-              <a:t>4/8/2023</a:t>
+              <a:t>4/10/2023</a:t>
             </a:fld>
             <a:endParaRPr lang="en-US"/>
           </a:p>
@@ -4312,7 +4312,7 @@
           <a:p>
             <a:fld id="{C3949FD8-F76C-4334-8F67-5261DAB8283B}" type="datetime1">
               <a:rPr lang="en-US" smtClean="0"/>
-              <a:t>4/8/2023</a:t>
+              <a:t>4/10/2023</a:t>
             </a:fld>
             <a:endParaRPr lang="en-US"/>
           </a:p>
@@ -4724,7 +4724,7 @@
           <a:p>
             <a:fld id="{FD3EE7BC-1A30-4086-BB3C-9A5B74FB52CD}" type="datetime1">
               <a:rPr lang="en-US" smtClean="0"/>
-              <a:t>4/8/2023</a:t>
+              <a:t>4/10/2023</a:t>
             </a:fld>
             <a:endParaRPr lang="en-US"/>
           </a:p>
@@ -4865,7 +4865,7 @@
           <a:p>
             <a:fld id="{7240562C-9A4D-4424-AA72-DCA8EAC67DF2}" type="datetime1">
               <a:rPr lang="en-US" smtClean="0"/>
-              <a:t>4/8/2023</a:t>
+              <a:t>4/10/2023</a:t>
             </a:fld>
             <a:endParaRPr lang="en-US"/>
           </a:p>
@@ -4978,7 +4978,7 @@
           <a:p>
             <a:fld id="{E2DCB292-5FFB-4199-8B72-18CE4DC27BE9}" type="datetime1">
               <a:rPr lang="en-US" smtClean="0"/>
-              <a:t>4/8/2023</a:t>
+              <a:t>4/10/2023</a:t>
             </a:fld>
             <a:endParaRPr lang="en-US"/>
           </a:p>
@@ -5289,7 +5289,7 @@
           <a:p>
             <a:fld id="{7A7481A3-5B6C-4EB6-A3A1-4996FCA10DC0}" type="datetime1">
               <a:rPr lang="en-US" smtClean="0"/>
-              <a:t>4/8/2023</a:t>
+              <a:t>4/10/2023</a:t>
             </a:fld>
             <a:endParaRPr lang="en-US"/>
           </a:p>
@@ -5577,7 +5577,7 @@
           <a:p>
             <a:fld id="{E405CF91-A7C1-47F6-886B-9E8209CA9E7C}" type="datetime1">
               <a:rPr lang="en-US" smtClean="0"/>
-              <a:t>4/8/2023</a:t>
+              <a:t>4/10/2023</a:t>
             </a:fld>
             <a:endParaRPr lang="en-US"/>
           </a:p>
@@ -5818,7 +5818,7 @@
           <a:p>
             <a:fld id="{ACF83ACE-CCB7-4256-8B11-BBA06764713F}" type="datetime1">
               <a:rPr lang="en-US" smtClean="0"/>
-              <a:t>4/8/2023</a:t>
+              <a:t>4/10/2023</a:t>
             </a:fld>
             <a:endParaRPr lang="en-US"/>
           </a:p>
@@ -28898,14 +28898,14 @@
         </p:spPr>
         <p:txBody>
           <a:bodyPr>
-            <a:normAutofit/>
+            <a:normAutofit fontScale="85000" lnSpcReduction="10000"/>
           </a:bodyPr>
           <a:lstStyle/>
           <a:p>
             <a:pPr lvl="1"/>
             <a:r>
               <a:rPr lang="en-US" sz="1700" dirty="0"/>
-              <a:t>Because of the current reliance on fossil fuels, the human population will confront a catastrophic energy crisis [1]. </a:t>
+              <a:t>Reliance on fossil fuels may lead to an energy crisis due to pollution and greenhouse gas emissions, making them unreliable as future energy sources. This creates challenges in finding cleaner and sustainable energy sources to meet future demands, such as solar and wind energy. However, these weather-dependent sources carry uncertainties in power production, with solar power being affected by weather conditions and cloud cover, impacting power dispatch. [1][2][3]</a:t>
             </a:r>
           </a:p>
           <a:p>
@@ -28918,7 +28918,7 @@
             <a:pPr lvl="1"/>
             <a:r>
               <a:rPr lang="en-US" sz="1700" dirty="0"/>
-              <a:t>Solar energy can considerably contribute to the world's electricity needs [2]. </a:t>
+              <a:t>To address the challenge of predicting solar irradiance for solar energy potential, models such as multi-regression and Artificial Neural Networks (ANN) have been developed. ANN, in particular, is gaining popularity in renewable energy forecasting as it can overcome limitations of time series models. ANN is a self-learning network that uses historical data to predict future values and is organized in layers with inputs at the bottom and outputs at the top. [4][5]</a:t>
             </a:r>
           </a:p>
           <a:p>
@@ -28931,7 +28931,15 @@
             <a:pPr lvl="1"/>
             <a:r>
               <a:rPr lang="en-US" sz="1700" dirty="0"/>
-              <a:t>PV solar panels are mostly dependent on the regular pattern of solar irradiation. The radiation magnitude is zero at night, increases at dawn, and decreases at night. In addition, the weather conditions at certain times, which will block sun energy, will have an effect [3].</a:t>
+              <a:t>This research aims to use advanced ANN models, including LSTM, Bi-LSTM, RNN, and </a:t>
+            </a:r>
+            <a:r>
+              <a:rPr lang="en-US" sz="1700" dirty="0" err="1"/>
+              <a:t>ConvLSTM</a:t>
+            </a:r>
+            <a:r>
+              <a:rPr lang="en-US" sz="1700" dirty="0"/>
+              <a:t>, to forecast solar power generation using plant data and weather information. A Flask-based REST API will be created for output predictions, reducing deviations in solar power production and maintaining reliability with accurate forecasting from advanced ANN models. [5][2]</a:t>
             </a:r>
           </a:p>
         </p:txBody>
@@ -29042,7 +29050,7 @@
           <a:p>
             <a:r>
               <a:rPr lang="en-US" sz="1700" dirty="0"/>
-              <a:t>The time series model is one of this study's most commonly employed algorithms, although it has several distinct limitations.</a:t>
+              <a:t>The motivation of this paper is to develop a predictive model for forecasting solar power generation using weather data. </a:t>
             </a:r>
           </a:p>
           <a:p>
@@ -29051,16 +29059,7 @@
           <a:p>
             <a:r>
               <a:rPr lang="en-US" sz="1700" dirty="0"/>
-              <a:t>Due to this, numerous algorithms are employed in solar forecasting, including statistical time series models and artificial neural networks (ANNs) which have recently gained widespread acceptance for renewable energy forecasts.</a:t>
-            </a:r>
-          </a:p>
-          <a:p>
-            <a:endParaRPr lang="en-US" sz="1700" dirty="0"/>
-          </a:p>
-          <a:p>
-            <a:r>
-              <a:rPr lang="en-US" sz="1700" dirty="0"/>
-              <a:t>LSTM, Bi-LSTM, Stacked Bi-LSTM, RNN, and GRU models were used to produce forecasts based on solar power generation and weather data from different regions in Korea.</a:t>
+              <a:t>Based on the background we can get that , accurate forecasting tools can help reduce deviations and maintain reliability in solar power generation, aiding investment decisions and distribution system planning.</a:t>
             </a:r>
           </a:p>
         </p:txBody>
@@ -30013,10 +30012,10 @@
       </p:sp>
       <p:pic>
         <p:nvPicPr>
-          <p:cNvPr id="5" name="Picture 4">
+          <p:cNvPr id="2" name="Picture 1" descr="Diagram&#10;&#10;Description automatically generated">
             <a:extLst>
               <a:ext uri="{FF2B5EF4-FFF2-40B4-BE49-F238E27FC236}">
-                <a16:creationId xmlns:a16="http://schemas.microsoft.com/office/drawing/2014/main" id="{6E8265E4-572E-24C0-1DDA-B1C84C1FCC84}"/>
+                <a16:creationId xmlns:a16="http://schemas.microsoft.com/office/drawing/2014/main" id="{72CCAA4B-8022-C800-4292-B2706192E17A}"/>
               </a:ext>
             </a:extLst>
           </p:cNvPr>
@@ -30026,15 +30025,22 @@
           <p:nvPr/>
         </p:nvPicPr>
         <p:blipFill>
-          <a:blip r:embed="rId3"/>
+          <a:blip r:embed="rId3" cstate="print">
+            <a:extLst>
+              <a:ext uri="{28A0092B-C50C-407E-A947-70E740481C1C}">
+                <a14:useLocalDpi xmlns:a14="http://schemas.microsoft.com/office/drawing/2010/main" val="0"/>
+              </a:ext>
+            </a:extLst>
+          </a:blip>
+          <a:srcRect/>
           <a:stretch>
             <a:fillRect/>
           </a:stretch>
         </p:blipFill>
-        <p:spPr>
+        <p:spPr bwMode="auto">
           <a:xfrm>
-            <a:off x="824627" y="1250759"/>
-            <a:ext cx="5359728" cy="4075049"/>
+            <a:off x="320811" y="2102564"/>
+            <a:ext cx="6063383" cy="2453631"/>
           </a:xfrm>
           <a:prstGeom prst="rect">
             <a:avLst/>
@@ -30043,15 +30049,14 @@
           <a:ln>
             <a:noFill/>
           </a:ln>
-          <a:effectLst/>
         </p:spPr>
       </p:pic>
       <p:sp>
         <p:nvSpPr>
-          <p:cNvPr id="12" name="TextBox 11">
+          <p:cNvPr id="6" name="Text Box 1">
             <a:extLst>
               <a:ext uri="{FF2B5EF4-FFF2-40B4-BE49-F238E27FC236}">
-                <a16:creationId xmlns:a16="http://schemas.microsoft.com/office/drawing/2014/main" id="{6F03B8C2-7820-4649-95E3-1B2710CE7B88}"/>
+                <a16:creationId xmlns:a16="http://schemas.microsoft.com/office/drawing/2014/main" id="{B3D77356-8B5D-40AE-65C1-12DA63E8BC80}"/>
               </a:ext>
             </a:extLst>
           </p:cNvPr>
@@ -30060,48 +30065,54 @@
         </p:nvSpPr>
         <p:spPr>
           <a:xfrm>
-            <a:off x="1559386" y="5490432"/>
-            <a:ext cx="2818682" cy="265394"/>
+            <a:off x="320811" y="5501209"/>
+            <a:ext cx="4465955" cy="243840"/>
           </a:xfrm>
           <a:prstGeom prst="rect">
             <a:avLst/>
           </a:prstGeom>
-          <a:noFill/>
+          <a:solidFill>
+            <a:prstClr val="white"/>
+          </a:solidFill>
+          <a:ln>
+            <a:noFill/>
+          </a:ln>
         </p:spPr>
         <p:txBody>
-          <a:bodyPr wrap="square">
+          <a:bodyPr rot="0" spcFirstLastPara="0" vert="horz" wrap="square" lIns="0" tIns="0" rIns="0" bIns="0" numCol="1" spcCol="0" rtlCol="0" fromWordArt="0" anchor="t" anchorCtr="0" forceAA="0" compatLnSpc="1">
+            <a:prstTxWarp prst="textNoShape">
+              <a:avLst/>
+            </a:prstTxWarp>
             <a:spAutoFit/>
           </a:bodyPr>
           <a:lstStyle/>
           <a:p>
-            <a:pPr marL="0" marR="0" indent="0" algn="ctr" fontAlgn="base" latinLnBrk="0">
-              <a:lnSpc>
-                <a:spcPct val="158000"/>
-              </a:lnSpc>
+            <a:pPr marL="0" marR="0" algn="ctr">
               <a:spcBef>
                 <a:spcPts val="0"/>
               </a:spcBef>
               <a:spcAft>
-                <a:spcPts val="400"/>
+                <a:spcPts val="1000"/>
               </a:spcAft>
             </a:pPr>
             <a:r>
-              <a:rPr lang="en-US" sz="800" kern="0" spc="-50" dirty="0">
+              <a:rPr lang="en-US" sz="800" i="0" dirty="0">
                 <a:solidFill>
-                  <a:srgbClr val="000000"/>
+                  <a:srgbClr val="44546A"/>
                 </a:solidFill>
                 <a:effectLst/>
-                <a:latin typeface="한양신명조"/>
-                <a:ea typeface="한양신명조"/>
+                <a:latin typeface="Times New Roman" panose="02020603050405020304" pitchFamily="18" charset="0"/>
+                <a:ea typeface="SimSun" panose="02010600030101010101" pitchFamily="2" charset="-122"/>
               </a:rPr>
-              <a:t>Figure 1. Develop Solar Power Generation Forecasting Using Weather Data</a:t>
+              <a:t>Fig. 1.  System Overview</a:t>
             </a:r>
-            <a:endParaRPr lang="en-US" sz="2400" kern="0" dirty="0">
+            <a:endParaRPr lang="en-US" sz="900" i="1" dirty="0">
               <a:solidFill>
-                <a:srgbClr val="000000"/>
+                <a:srgbClr val="44546A"/>
               </a:solidFill>
               <a:effectLst/>
-              <a:latin typeface="한양신명조"/>
+              <a:latin typeface="Times New Roman" panose="02020603050405020304" pitchFamily="18" charset="0"/>
+              <a:ea typeface="SimSun" panose="02010600030101010101" pitchFamily="2" charset="-122"/>
             </a:endParaRPr>
           </a:p>
         </p:txBody>
